--- a/Poli per caso/midterm presentazione/Controllo in cascata chiaro.pptx
+++ b/Poli per caso/midterm presentazione/Controllo in cascata chiaro.pptx
@@ -5,7 +5,7 @@
     <p:sldMasterId id="2147483678" r:id="rId1"/>
   </p:sldMasterIdLst>
   <p:notesMasterIdLst>
-    <p:notesMasterId r:id="rId22"/>
+    <p:notesMasterId r:id="rId24"/>
   </p:notesMasterIdLst>
   <p:sldIdLst>
     <p:sldId id="256" r:id="rId2"/>
@@ -26,8 +26,10 @@
     <p:sldId id="277" r:id="rId17"/>
     <p:sldId id="268" r:id="rId18"/>
     <p:sldId id="267" r:id="rId19"/>
-    <p:sldId id="269" r:id="rId20"/>
-    <p:sldId id="262" r:id="rId21"/>
+    <p:sldId id="280" r:id="rId20"/>
+    <p:sldId id="269" r:id="rId21"/>
+    <p:sldId id="281" r:id="rId22"/>
+    <p:sldId id="262" r:id="rId23"/>
   </p:sldIdLst>
   <p:sldSz cx="12192000" cy="6858000"/>
   <p:notesSz cx="6858000" cy="9144000"/>
@@ -216,7 +218,7 @@
           <a:p>
             <a:fld id="{0785EDD4-5CBD-4E7E-B9F6-7542EBDDEC22}" type="datetimeFigureOut">
               <a:rPr lang="it-IT" smtClean="0"/>
-              <a:t>09/04/2025</a:t>
+              <a:t>10/04/2025</a:t>
             </a:fld>
             <a:endParaRPr lang="it-IT"/>
           </a:p>
@@ -630,7 +632,7 @@
           <a:p>
             <a:fld id="{35AEA80D-BF04-4C73-96FA-3DB745680143}" type="datetimeFigureOut">
               <a:rPr lang="it-IT" smtClean="0"/>
-              <a:t>09/04/2025</a:t>
+              <a:t>10/04/2025</a:t>
             </a:fld>
             <a:endParaRPr lang="it-IT"/>
           </a:p>
@@ -828,7 +830,7 @@
           <a:p>
             <a:fld id="{35AEA80D-BF04-4C73-96FA-3DB745680143}" type="datetimeFigureOut">
               <a:rPr lang="it-IT" smtClean="0"/>
-              <a:t>09/04/2025</a:t>
+              <a:t>10/04/2025</a:t>
             </a:fld>
             <a:endParaRPr lang="it-IT"/>
           </a:p>
@@ -1036,7 +1038,7 @@
           <a:p>
             <a:fld id="{35AEA80D-BF04-4C73-96FA-3DB745680143}" type="datetimeFigureOut">
               <a:rPr lang="it-IT" smtClean="0"/>
-              <a:t>09/04/2025</a:t>
+              <a:t>10/04/2025</a:t>
             </a:fld>
             <a:endParaRPr lang="it-IT"/>
           </a:p>
@@ -1234,7 +1236,7 @@
           <a:p>
             <a:fld id="{35AEA80D-BF04-4C73-96FA-3DB745680143}" type="datetimeFigureOut">
               <a:rPr lang="it-IT" smtClean="0"/>
-              <a:t>09/04/2025</a:t>
+              <a:t>10/04/2025</a:t>
             </a:fld>
             <a:endParaRPr lang="it-IT"/>
           </a:p>
@@ -1509,7 +1511,7 @@
           <a:p>
             <a:fld id="{35AEA80D-BF04-4C73-96FA-3DB745680143}" type="datetimeFigureOut">
               <a:rPr lang="it-IT" smtClean="0"/>
-              <a:t>09/04/2025</a:t>
+              <a:t>10/04/2025</a:t>
             </a:fld>
             <a:endParaRPr lang="it-IT"/>
           </a:p>
@@ -1774,7 +1776,7 @@
           <a:p>
             <a:fld id="{35AEA80D-BF04-4C73-96FA-3DB745680143}" type="datetimeFigureOut">
               <a:rPr lang="it-IT" smtClean="0"/>
-              <a:t>09/04/2025</a:t>
+              <a:t>10/04/2025</a:t>
             </a:fld>
             <a:endParaRPr lang="it-IT"/>
           </a:p>
@@ -2186,7 +2188,7 @@
           <a:p>
             <a:fld id="{35AEA80D-BF04-4C73-96FA-3DB745680143}" type="datetimeFigureOut">
               <a:rPr lang="it-IT" smtClean="0"/>
-              <a:t>09/04/2025</a:t>
+              <a:t>10/04/2025</a:t>
             </a:fld>
             <a:endParaRPr lang="it-IT"/>
           </a:p>
@@ -2327,7 +2329,7 @@
           <a:p>
             <a:fld id="{35AEA80D-BF04-4C73-96FA-3DB745680143}" type="datetimeFigureOut">
               <a:rPr lang="it-IT" smtClean="0"/>
-              <a:t>09/04/2025</a:t>
+              <a:t>10/04/2025</a:t>
             </a:fld>
             <a:endParaRPr lang="it-IT"/>
           </a:p>
@@ -2440,7 +2442,7 @@
           <a:p>
             <a:fld id="{35AEA80D-BF04-4C73-96FA-3DB745680143}" type="datetimeFigureOut">
               <a:rPr lang="it-IT" smtClean="0"/>
-              <a:t>09/04/2025</a:t>
+              <a:t>10/04/2025</a:t>
             </a:fld>
             <a:endParaRPr lang="it-IT"/>
           </a:p>
@@ -2751,7 +2753,7 @@
           <a:p>
             <a:fld id="{35AEA80D-BF04-4C73-96FA-3DB745680143}" type="datetimeFigureOut">
               <a:rPr lang="it-IT" smtClean="0"/>
-              <a:t>09/04/2025</a:t>
+              <a:t>10/04/2025</a:t>
             </a:fld>
             <a:endParaRPr lang="it-IT"/>
           </a:p>
@@ -3039,7 +3041,7 @@
           <a:p>
             <a:fld id="{35AEA80D-BF04-4C73-96FA-3DB745680143}" type="datetimeFigureOut">
               <a:rPr lang="it-IT" smtClean="0"/>
-              <a:t>09/04/2025</a:t>
+              <a:t>10/04/2025</a:t>
             </a:fld>
             <a:endParaRPr lang="it-IT"/>
           </a:p>
@@ -3280,7 +3282,7 @@
           <a:p>
             <a:fld id="{35AEA80D-BF04-4C73-96FA-3DB745680143}" type="datetimeFigureOut">
               <a:rPr lang="it-IT" smtClean="0"/>
-              <a:t>09/04/2025</a:t>
+              <a:t>10/04/2025</a:t>
             </a:fld>
             <a:endParaRPr lang="it-IT"/>
           </a:p>
@@ -5097,7 +5099,7 @@
           <p:cNvPr id="2" name="Titolo 1">
             <a:extLst>
               <a:ext uri="{FF2B5EF4-FFF2-40B4-BE49-F238E27FC236}">
-                <a16:creationId xmlns:a16="http://schemas.microsoft.com/office/drawing/2014/main" id="{A9C99190-386D-3FF5-9360-2D1C40753075}"/>
+                <a16:creationId xmlns:a16="http://schemas.microsoft.com/office/drawing/2014/main" id="{EAC8B836-6662-11AF-E5D5-9CC68E4F0C34}"/>
               </a:ext>
             </a:extLst>
           </p:cNvPr>
@@ -5115,17 +5117,17 @@
           <a:p>
             <a:r>
               <a:rPr lang="it-IT" dirty="0"/>
-              <a:t>Problema per partenza diversa da zero</a:t>
+              <a:t>Simulazione partenza diversa da zero</a:t>
             </a:r>
           </a:p>
         </p:txBody>
       </p:sp>
       <p:pic>
         <p:nvPicPr>
-          <p:cNvPr id="9" name="Segnaposto contenuto 8" descr="Immagine che contiene schermata, giallo, diagramma, Rettangolo&#10;&#10;Il contenuto generato dall'IA potrebbe non essere corretto.">
-            <a:extLst>
-              <a:ext uri="{FF2B5EF4-FFF2-40B4-BE49-F238E27FC236}">
-                <a16:creationId xmlns:a16="http://schemas.microsoft.com/office/drawing/2014/main" id="{7055611B-48F1-D156-0F0E-D1987B5724D1}"/>
+          <p:cNvPr id="5" name="Segnaposto contenuto 4" descr="Immagine che contiene schermata, giallo, Rettangolo, diagramma&#10;&#10;Il contenuto generato dall'IA potrebbe non essere corretto.">
+            <a:extLst>
+              <a:ext uri="{FF2B5EF4-FFF2-40B4-BE49-F238E27FC236}">
+                <a16:creationId xmlns:a16="http://schemas.microsoft.com/office/drawing/2014/main" id="{FD1BCBD7-E8C0-6275-5098-4909A48758FB}"/>
               </a:ext>
             </a:extLst>
           </p:cNvPr>
@@ -5150,80 +5152,51 @@
         </p:blipFill>
         <p:spPr>
           <a:xfrm>
-            <a:off x="150741" y="2218357"/>
-            <a:ext cx="11890518" cy="2304889"/>
+            <a:off x="270105" y="1888015"/>
+            <a:ext cx="11651789" cy="2256472"/>
           </a:xfrm>
         </p:spPr>
       </p:pic>
-      <p:sp>
-        <p:nvSpPr>
-          <p:cNvPr id="3" name="CasellaDiTesto 2">
-            <a:extLst>
-              <a:ext uri="{FF2B5EF4-FFF2-40B4-BE49-F238E27FC236}">
-                <a16:creationId xmlns:a16="http://schemas.microsoft.com/office/drawing/2014/main" id="{C9420215-A1A6-CDE2-DAE3-92C21BD557E5}"/>
-              </a:ext>
-            </a:extLst>
-          </p:cNvPr>
-          <p:cNvSpPr txBox="1"/>
+      <p:pic>
+        <p:nvPicPr>
+          <p:cNvPr id="7" name="Immagine 6" descr="Immagine che contiene schermata, linea, Diagramma&#10;&#10;Il contenuto generato dall'IA potrebbe non essere corretto.">
+            <a:extLst>
+              <a:ext uri="{FF2B5EF4-FFF2-40B4-BE49-F238E27FC236}">
+                <a16:creationId xmlns:a16="http://schemas.microsoft.com/office/drawing/2014/main" id="{670142EE-8799-0786-007D-1D9D16F70B03}"/>
+              </a:ext>
+            </a:extLst>
+          </p:cNvPr>
+          <p:cNvPicPr>
+            <a:picLocks noChangeAspect="1"/>
+          </p:cNvPicPr>
           <p:nvPr/>
-        </p:nvSpPr>
+        </p:nvPicPr>
+        <p:blipFill>
+          <a:blip r:embed="rId3">
+            <a:extLst>
+              <a:ext uri="{28A0092B-C50C-407E-A947-70E740481C1C}">
+                <a14:useLocalDpi xmlns:a14="http://schemas.microsoft.com/office/drawing/2010/main" val="0"/>
+              </a:ext>
+            </a:extLst>
+          </a:blip>
+          <a:stretch>
+            <a:fillRect/>
+          </a:stretch>
+        </p:blipFill>
         <p:spPr>
           <a:xfrm>
-            <a:off x="1124220" y="5029202"/>
-            <a:ext cx="11023787" cy="1015663"/>
+            <a:off x="6217920" y="4199223"/>
+            <a:ext cx="5410200" cy="2490913"/>
           </a:xfrm>
           <a:prstGeom prst="rect">
             <a:avLst/>
           </a:prstGeom>
-          <a:noFill/>
         </p:spPr>
-        <p:txBody>
-          <a:bodyPr wrap="none" rtlCol="0">
-            <a:spAutoFit/>
-          </a:bodyPr>
-          <a:lstStyle/>
-          <a:p>
-            <a:r>
-              <a:rPr lang="it-IT" sz="2000" dirty="0">
-                <a:solidFill>
-                  <a:schemeClr val="tx2">
-                    <a:lumMod val="25000"/>
-                  </a:schemeClr>
-                </a:solidFill>
-              </a:rPr>
-              <a:t>Nel caso reale il controllore partirà da una situazione in cui il circuito elettrico sarà già caricato </a:t>
-            </a:r>
-          </a:p>
-          <a:p>
-            <a:r>
-              <a:rPr lang="it-IT" sz="2000" dirty="0">
-                <a:solidFill>
-                  <a:schemeClr val="tx2">
-                    <a:lumMod val="25000"/>
-                  </a:schemeClr>
-                </a:solidFill>
-              </a:rPr>
-              <a:t>E la posizione non sarà nulla.</a:t>
-            </a:r>
-          </a:p>
-          <a:p>
-            <a:r>
-              <a:rPr lang="it-IT" sz="2000" dirty="0">
-                <a:solidFill>
-                  <a:schemeClr val="tx2">
-                    <a:lumMod val="25000"/>
-                  </a:schemeClr>
-                </a:solidFill>
-              </a:rPr>
-              <a:t>Nel tentativo di fare una simulazione che parta da una posizione diversa il controllore non stabilizza</a:t>
-            </a:r>
-          </a:p>
-        </p:txBody>
-      </p:sp>
+      </p:pic>
     </p:spTree>
     <p:extLst>
       <p:ext uri="{BB962C8B-B14F-4D97-AF65-F5344CB8AC3E}">
-        <p14:creationId xmlns:p14="http://schemas.microsoft.com/office/powerpoint/2010/main" val="2968946092"/>
+        <p14:creationId xmlns:p14="http://schemas.microsoft.com/office/powerpoint/2010/main" val="2768329264"/>
       </p:ext>
     </p:extLst>
   </p:cSld>
@@ -5370,6 +5343,335 @@
           <p:cNvPr id="2" name="Titolo 1">
             <a:extLst>
               <a:ext uri="{FF2B5EF4-FFF2-40B4-BE49-F238E27FC236}">
+                <a16:creationId xmlns:a16="http://schemas.microsoft.com/office/drawing/2014/main" id="{A9C99190-386D-3FF5-9360-2D1C40753075}"/>
+              </a:ext>
+            </a:extLst>
+          </p:cNvPr>
+          <p:cNvSpPr>
+            <a:spLocks noGrp="1"/>
+          </p:cNvSpPr>
+          <p:nvPr>
+            <p:ph type="title"/>
+          </p:nvPr>
+        </p:nvSpPr>
+        <p:spPr/>
+        <p:txBody>
+          <a:bodyPr/>
+          <a:lstStyle/>
+          <a:p>
+            <a:r>
+              <a:rPr lang="it-IT" dirty="0"/>
+              <a:t>Problema per partenza diversa da zero</a:t>
+            </a:r>
+          </a:p>
+        </p:txBody>
+      </p:sp>
+      <p:pic>
+        <p:nvPicPr>
+          <p:cNvPr id="9" name="Segnaposto contenuto 8" descr="Immagine che contiene schermata, giallo, diagramma, Rettangolo&#10;&#10;Il contenuto generato dall'IA potrebbe non essere corretto.">
+            <a:extLst>
+              <a:ext uri="{FF2B5EF4-FFF2-40B4-BE49-F238E27FC236}">
+                <a16:creationId xmlns:a16="http://schemas.microsoft.com/office/drawing/2014/main" id="{7055611B-48F1-D156-0F0E-D1987B5724D1}"/>
+              </a:ext>
+            </a:extLst>
+          </p:cNvPr>
+          <p:cNvPicPr>
+            <a:picLocks noGrp="1" noChangeAspect="1"/>
+          </p:cNvPicPr>
+          <p:nvPr>
+            <p:ph idx="1"/>
+          </p:nvPr>
+        </p:nvPicPr>
+        <p:blipFill>
+          <a:blip r:embed="rId2">
+            <a:extLst>
+              <a:ext uri="{28A0092B-C50C-407E-A947-70E740481C1C}">
+                <a14:useLocalDpi xmlns:a14="http://schemas.microsoft.com/office/drawing/2010/main" val="0"/>
+              </a:ext>
+            </a:extLst>
+          </a:blip>
+          <a:stretch>
+            <a:fillRect/>
+          </a:stretch>
+        </p:blipFill>
+        <p:spPr>
+          <a:xfrm>
+            <a:off x="150741" y="1690688"/>
+            <a:ext cx="11890518" cy="2304889"/>
+          </a:xfrm>
+        </p:spPr>
+      </p:pic>
+      <p:sp>
+        <p:nvSpPr>
+          <p:cNvPr id="3" name="CasellaDiTesto 2">
+            <a:extLst>
+              <a:ext uri="{FF2B5EF4-FFF2-40B4-BE49-F238E27FC236}">
+                <a16:creationId xmlns:a16="http://schemas.microsoft.com/office/drawing/2014/main" id="{C9420215-A1A6-CDE2-DAE3-92C21BD557E5}"/>
+              </a:ext>
+            </a:extLst>
+          </p:cNvPr>
+          <p:cNvSpPr txBox="1"/>
+          <p:nvPr/>
+        </p:nvSpPr>
+        <p:spPr>
+          <a:xfrm>
+            <a:off x="346981" y="5050915"/>
+            <a:ext cx="6678660" cy="1631216"/>
+          </a:xfrm>
+          <a:prstGeom prst="rect">
+            <a:avLst/>
+          </a:prstGeom>
+          <a:noFill/>
+        </p:spPr>
+        <p:txBody>
+          <a:bodyPr wrap="square" rtlCol="0">
+            <a:spAutoFit/>
+          </a:bodyPr>
+          <a:lstStyle/>
+          <a:p>
+            <a:r>
+              <a:rPr lang="it-IT" sz="2000" dirty="0">
+                <a:solidFill>
+                  <a:schemeClr val="tx2">
+                    <a:lumMod val="25000"/>
+                  </a:schemeClr>
+                </a:solidFill>
+              </a:rPr>
+              <a:t>Nel caso reale il controllore partirà da una situazione in cui il circuito elettrico sarà già caricato </a:t>
+            </a:r>
+          </a:p>
+          <a:p>
+            <a:r>
+              <a:rPr lang="it-IT" sz="2000" dirty="0">
+                <a:solidFill>
+                  <a:schemeClr val="tx2">
+                    <a:lumMod val="25000"/>
+                  </a:schemeClr>
+                </a:solidFill>
+              </a:rPr>
+              <a:t>E la posizione non sarà nulla.</a:t>
+            </a:r>
+          </a:p>
+          <a:p>
+            <a:r>
+              <a:rPr lang="it-IT" sz="2000" dirty="0">
+                <a:solidFill>
+                  <a:schemeClr val="tx2">
+                    <a:lumMod val="25000"/>
+                  </a:schemeClr>
+                </a:solidFill>
+              </a:rPr>
+              <a:t>Nel tentativo di fare una simulazione che parta da una posizione diversa il controllore non stabilizza</a:t>
+            </a:r>
+          </a:p>
+        </p:txBody>
+      </p:sp>
+      <p:pic>
+        <p:nvPicPr>
+          <p:cNvPr id="5" name="Immagine 4" descr="Immagine che contiene schermata&#10;&#10;Il contenuto generato dall'IA potrebbe non essere corretto.">
+            <a:extLst>
+              <a:ext uri="{FF2B5EF4-FFF2-40B4-BE49-F238E27FC236}">
+                <a16:creationId xmlns:a16="http://schemas.microsoft.com/office/drawing/2014/main" id="{F38FB94B-300F-D0AF-9D73-5DD51A7B8B31}"/>
+              </a:ext>
+            </a:extLst>
+          </p:cNvPr>
+          <p:cNvPicPr>
+            <a:picLocks noChangeAspect="1"/>
+          </p:cNvPicPr>
+          <p:nvPr/>
+        </p:nvPicPr>
+        <p:blipFill>
+          <a:blip r:embed="rId3">
+            <a:extLst>
+              <a:ext uri="{28A0092B-C50C-407E-A947-70E740481C1C}">
+                <a14:useLocalDpi xmlns:a14="http://schemas.microsoft.com/office/drawing/2010/main" val="0"/>
+              </a:ext>
+            </a:extLst>
+          </a:blip>
+          <a:stretch>
+            <a:fillRect/>
+          </a:stretch>
+        </p:blipFill>
+        <p:spPr>
+          <a:xfrm>
+            <a:off x="7025640" y="4523246"/>
+            <a:ext cx="4710921" cy="2158885"/>
+          </a:xfrm>
+          <a:prstGeom prst="rect">
+            <a:avLst/>
+          </a:prstGeom>
+        </p:spPr>
+      </p:pic>
+    </p:spTree>
+    <p:extLst>
+      <p:ext uri="{BB962C8B-B14F-4D97-AF65-F5344CB8AC3E}">
+        <p14:creationId xmlns:p14="http://schemas.microsoft.com/office/powerpoint/2010/main" val="2968946092"/>
+      </p:ext>
+    </p:extLst>
+  </p:cSld>
+  <p:clrMapOvr>
+    <a:masterClrMapping/>
+  </p:clrMapOvr>
+</p:sld>
+</file>
+
+<file path=ppt/slides/slide21.xml><?xml version="1.0" encoding="utf-8"?>
+<p:sld xmlns:a="http://schemas.openxmlformats.org/drawingml/2006/main" xmlns:r="http://schemas.openxmlformats.org/officeDocument/2006/relationships" xmlns:p="http://schemas.openxmlformats.org/presentationml/2006/main">
+  <p:cSld>
+    <p:spTree>
+      <p:nvGrpSpPr>
+        <p:cNvPr id="1" name=""/>
+        <p:cNvGrpSpPr/>
+        <p:nvPr/>
+      </p:nvGrpSpPr>
+      <p:grpSpPr>
+        <a:xfrm>
+          <a:off x="0" y="0"/>
+          <a:ext cx="0" cy="0"/>
+          <a:chOff x="0" y="0"/>
+          <a:chExt cx="0" cy="0"/>
+        </a:xfrm>
+      </p:grpSpPr>
+      <p:sp>
+        <p:nvSpPr>
+          <p:cNvPr id="2" name="Titolo 1">
+            <a:extLst>
+              <a:ext uri="{FF2B5EF4-FFF2-40B4-BE49-F238E27FC236}">
+                <a16:creationId xmlns:a16="http://schemas.microsoft.com/office/drawing/2014/main" id="{7C349EBA-955A-2609-DC37-DF1E17970ACF}"/>
+              </a:ext>
+            </a:extLst>
+          </p:cNvPr>
+          <p:cNvSpPr>
+            <a:spLocks noGrp="1"/>
+          </p:cNvSpPr>
+          <p:nvPr>
+            <p:ph type="title"/>
+          </p:nvPr>
+        </p:nvSpPr>
+        <p:spPr/>
+        <p:txBody>
+          <a:bodyPr/>
+          <a:lstStyle/>
+          <a:p>
+            <a:r>
+              <a:rPr lang="it-IT" dirty="0"/>
+              <a:t>Tensione va a un riferimento diverso</a:t>
+            </a:r>
+          </a:p>
+        </p:txBody>
+      </p:sp>
+      <p:pic>
+        <p:nvPicPr>
+          <p:cNvPr id="8" name="Segnaposto contenuto 7" descr="Immagine che contiene schermata&#10;&#10;Il contenuto generato dall'IA potrebbe non essere corretto.">
+            <a:extLst>
+              <a:ext uri="{FF2B5EF4-FFF2-40B4-BE49-F238E27FC236}">
+                <a16:creationId xmlns:a16="http://schemas.microsoft.com/office/drawing/2014/main" id="{927FFF08-CDB5-0C7E-4632-378B78EDC55B}"/>
+              </a:ext>
+            </a:extLst>
+          </p:cNvPr>
+          <p:cNvPicPr>
+            <a:picLocks noGrp="1" noChangeAspect="1"/>
+          </p:cNvPicPr>
+          <p:nvPr>
+            <p:ph idx="1"/>
+          </p:nvPr>
+        </p:nvPicPr>
+        <p:blipFill>
+          <a:blip r:embed="rId2">
+            <a:extLst>
+              <a:ext uri="{28A0092B-C50C-407E-A947-70E740481C1C}">
+                <a14:useLocalDpi xmlns:a14="http://schemas.microsoft.com/office/drawing/2010/main" val="0"/>
+              </a:ext>
+            </a:extLst>
+          </a:blip>
+          <a:stretch>
+            <a:fillRect/>
+          </a:stretch>
+        </p:blipFill>
+        <p:spPr>
+          <a:xfrm>
+            <a:off x="1344339" y="1825625"/>
+            <a:ext cx="9503322" cy="4351338"/>
+          </a:xfrm>
+          <a:prstGeom prst="rect">
+            <a:avLst/>
+          </a:prstGeom>
+        </p:spPr>
+      </p:pic>
+      <p:sp>
+        <p:nvSpPr>
+          <p:cNvPr id="4" name="CasellaDiTesto 3">
+            <a:extLst>
+              <a:ext uri="{FF2B5EF4-FFF2-40B4-BE49-F238E27FC236}">
+                <a16:creationId xmlns:a16="http://schemas.microsoft.com/office/drawing/2014/main" id="{DB9F4050-5E6B-D341-D015-78428769B7AE}"/>
+              </a:ext>
+            </a:extLst>
+          </p:cNvPr>
+          <p:cNvSpPr txBox="1"/>
+          <p:nvPr/>
+        </p:nvSpPr>
+        <p:spPr>
+          <a:xfrm>
+            <a:off x="5636301" y="2968052"/>
+            <a:ext cx="3972394" cy="369332"/>
+          </a:xfrm>
+          <a:prstGeom prst="rect">
+            <a:avLst/>
+          </a:prstGeom>
+          <a:noFill/>
+        </p:spPr>
+        <p:txBody>
+          <a:bodyPr wrap="square" rtlCol="0">
+            <a:spAutoFit/>
+          </a:bodyPr>
+          <a:lstStyle/>
+          <a:p>
+            <a:r>
+              <a:rPr lang="it-IT" dirty="0">
+                <a:solidFill>
+                  <a:schemeClr val="bg1"/>
+                </a:solidFill>
+              </a:rPr>
+              <a:t>Nel caso di partenza da zero</a:t>
+            </a:r>
+          </a:p>
+        </p:txBody>
+      </p:sp>
+    </p:spTree>
+    <p:extLst>
+      <p:ext uri="{BB962C8B-B14F-4D97-AF65-F5344CB8AC3E}">
+        <p14:creationId xmlns:p14="http://schemas.microsoft.com/office/powerpoint/2010/main" val="1623274855"/>
+      </p:ext>
+    </p:extLst>
+  </p:cSld>
+  <p:clrMapOvr>
+    <a:masterClrMapping/>
+  </p:clrMapOvr>
+</p:sld>
+</file>
+
+<file path=ppt/slides/slide22.xml><?xml version="1.0" encoding="utf-8"?>
+<p:sld xmlns:a="http://schemas.openxmlformats.org/drawingml/2006/main" xmlns:r="http://schemas.openxmlformats.org/officeDocument/2006/relationships" xmlns:p="http://schemas.openxmlformats.org/presentationml/2006/main">
+  <p:cSld>
+    <p:spTree>
+      <p:nvGrpSpPr>
+        <p:cNvPr id="1" name=""/>
+        <p:cNvGrpSpPr/>
+        <p:nvPr/>
+      </p:nvGrpSpPr>
+      <p:grpSpPr>
+        <a:xfrm>
+          <a:off x="0" y="0"/>
+          <a:ext cx="0" cy="0"/>
+          <a:chOff x="0" y="0"/>
+          <a:chExt cx="0" cy="0"/>
+        </a:xfrm>
+      </p:grpSpPr>
+      <p:sp>
+        <p:nvSpPr>
+          <p:cNvPr id="2" name="Titolo 1">
+            <a:extLst>
+              <a:ext uri="{FF2B5EF4-FFF2-40B4-BE49-F238E27FC236}">
                 <a16:creationId xmlns:a16="http://schemas.microsoft.com/office/drawing/2014/main" id="{983E421F-C963-1FA7-F4B0-5B986F50A673}"/>
               </a:ext>
             </a:extLst>
@@ -5450,8 +5752,8 @@
           <a:chExt cx="0" cy="0"/>
         </a:xfrm>
       </p:grpSpPr>
-      <mc:AlternateContent xmlns:mc="http://schemas.openxmlformats.org/markup-compatibility/2006">
-        <mc:Choice xmlns:a14="http://schemas.microsoft.com/office/drawing/2010/main" Requires="a14">
+      <mc:AlternateContent xmlns:mc="http://schemas.openxmlformats.org/markup-compatibility/2006" xmlns:a14="http://schemas.microsoft.com/office/drawing/2010/main">
+        <mc:Choice Requires="a14">
           <p:sp>
             <p:nvSpPr>
               <p:cNvPr id="2" name="Titolo 1">
@@ -5520,7 +5822,7 @@
             </p:txBody>
           </p:sp>
         </mc:Choice>
-        <mc:Fallback>
+        <mc:Fallback xmlns="">
           <p:sp>
             <p:nvSpPr>
               <p:cNvPr id="2" name="Titolo 1">
@@ -5595,8 +5897,8 @@
           </a:xfrm>
         </p:spPr>
       </p:pic>
-      <mc:AlternateContent xmlns:mc="http://schemas.openxmlformats.org/markup-compatibility/2006">
-        <mc:Choice xmlns:a14="http://schemas.microsoft.com/office/drawing/2010/main" Requires="a14">
+      <mc:AlternateContent xmlns:mc="http://schemas.openxmlformats.org/markup-compatibility/2006" xmlns:a14="http://schemas.microsoft.com/office/drawing/2010/main">
+        <mc:Choice Requires="a14">
           <p:sp>
             <p:nvSpPr>
               <p:cNvPr id="6" name="CasellaDiTesto 5">
@@ -5645,18 +5947,24 @@
                     <m:sSub>
                       <m:sSubPr>
                         <m:ctrlPr>
-                          <a:rPr lang="it-IT" sz="2000"/>
+                          <a:rPr lang="it-IT" sz="2000" i="1">
+                            <a:latin typeface="Cambria Math" panose="02040503050406030204" pitchFamily="18" charset="0"/>
+                          </a:rPr>
                         </m:ctrlPr>
                       </m:sSubPr>
                       <m:e>
                         <m:r>
-                          <a:rPr lang="it-IT" sz="2000"/>
+                          <a:rPr lang="it-IT" sz="2000">
+                            <a:latin typeface="Cambria Math" panose="02040503050406030204" pitchFamily="18" charset="0"/>
+                          </a:rPr>
                           <m:t>𝑤</m:t>
                         </m:r>
                       </m:e>
                       <m:sub>
                         <m:r>
-                          <a:rPr lang="it-IT" sz="2000"/>
+                          <a:rPr lang="it-IT" sz="2000">
+                            <a:latin typeface="Cambria Math" panose="02040503050406030204" pitchFamily="18" charset="0"/>
+                          </a:rPr>
                           <m:t>𝑐</m:t>
                         </m:r>
                       </m:sub>
@@ -5671,7 +5979,7 @@
             </p:txBody>
           </p:sp>
         </mc:Choice>
-        <mc:Fallback>
+        <mc:Fallback xmlns="">
           <p:sp>
             <p:nvSpPr>
               <p:cNvPr id="6" name="CasellaDiTesto 5">
@@ -5937,8 +6245,8 @@
           </a:p>
         </p:txBody>
       </p:sp>
-      <mc:AlternateContent xmlns:mc="http://schemas.openxmlformats.org/markup-compatibility/2006">
-        <mc:Choice xmlns:a14="http://schemas.microsoft.com/office/drawing/2010/main" Requires="a14">
+      <mc:AlternateContent xmlns:mc="http://schemas.openxmlformats.org/markup-compatibility/2006" xmlns:a14="http://schemas.microsoft.com/office/drawing/2010/main">
+        <mc:Choice Requires="a14">
           <p:sp>
             <p:nvSpPr>
               <p:cNvPr id="14" name="CasellaDiTesto 13">
@@ -6001,7 +6309,9 @@
                     <m:f>
                       <m:fPr>
                         <m:ctrlPr>
-                          <a:rPr lang="it-IT" sz="2000"/>
+                          <a:rPr lang="it-IT" sz="2000" i="1">
+                            <a:latin typeface="Cambria Math" panose="02040503050406030204" pitchFamily="18" charset="0"/>
+                          </a:rPr>
                         </m:ctrlPr>
                       </m:fPr>
                       <m:num>
@@ -6032,7 +6342,9 @@
                           <m:rPr>
                             <m:sty m:val="p"/>
                           </m:rPr>
-                          <a:rPr lang="it-IT" sz="2000"/>
+                          <a:rPr lang="it-IT" sz="2000">
+                            <a:latin typeface="Cambria Math" panose="02040503050406030204" pitchFamily="18" charset="0"/>
+                          </a:rPr>
                           <m:t>s</m:t>
                         </m:r>
                       </m:den>
@@ -6042,7 +6354,6 @@
                 <a:endParaRPr lang="it-IT" sz="2000" dirty="0"/>
               </a:p>
               <a:p>
-                <a:pPr/>
                 <a:endParaRPr lang="it-IT" sz="2000" dirty="0"/>
               </a:p>
               <a:p>
@@ -6057,42 +6368,45 @@
                         <m:rPr>
                           <m:sty m:val="p"/>
                         </m:rPr>
-                        <a:rPr lang="it-IT" sz="2000"/>
+                        <a:rPr lang="it-IT" sz="2000">
+                          <a:latin typeface="Cambria Math" panose="02040503050406030204" pitchFamily="18" charset="0"/>
+                        </a:rPr>
                         <m:t>poli</m:t>
                       </m:r>
                       <m:r>
-                        <a:rPr lang="it-IT" sz="2000"/>
+                        <a:rPr lang="it-IT" sz="2000">
+                          <a:latin typeface="Cambria Math" panose="02040503050406030204" pitchFamily="18" charset="0"/>
+                        </a:rPr>
                         <m:t> </m:t>
                       </m:r>
                       <m:r>
                         <m:rPr>
                           <m:sty m:val="p"/>
                         </m:rPr>
-                        <a:rPr lang="it-IT" sz="2000"/>
+                        <a:rPr lang="it-IT" sz="2000">
+                          <a:latin typeface="Cambria Math" panose="02040503050406030204" pitchFamily="18" charset="0"/>
+                        </a:rPr>
                         <m:t>anello</m:t>
                       </m:r>
                       <m:r>
-                        <a:rPr lang="it-IT" sz="2000"/>
+                        <a:rPr lang="it-IT" sz="2000">
+                          <a:latin typeface="Cambria Math" panose="02040503050406030204" pitchFamily="18" charset="0"/>
+                        </a:rPr>
                         <m:t> </m:t>
                       </m:r>
                       <m:r>
                         <m:rPr>
                           <m:sty m:val="p"/>
                         </m:rPr>
-                        <a:rPr lang="it-IT" sz="2000"/>
-                        <m:t>chius</m:t>
+                        <a:rPr lang="it-IT" sz="2000">
+                          <a:latin typeface="Cambria Math" panose="02040503050406030204" pitchFamily="18" charset="0"/>
+                        </a:rPr>
+                        <m:t>chiuso</m:t>
                       </m:r>
                       <m:r>
-                        <m:rPr>
-                          <m:sty m:val="p"/>
-                        </m:rPr>
-                        <a:rPr lang="it-IT" sz="2000" b="0" i="0" smtClean="0">
+                        <a:rPr lang="it-IT" sz="2000">
                           <a:latin typeface="Cambria Math" panose="02040503050406030204" pitchFamily="18" charset="0"/>
                         </a:rPr>
-                        <m:t>o</m:t>
-                      </m:r>
-                      <m:r>
-                        <a:rPr lang="it-IT" sz="2000"/>
                         <m:t>=</m:t>
                       </m:r>
                       <m:d>
@@ -6100,7 +6414,9 @@
                           <m:begChr m:val="["/>
                           <m:endChr m:val="]"/>
                           <m:ctrlPr>
-                            <a:rPr lang="it-IT" sz="2000"/>
+                            <a:rPr lang="it-IT" sz="2000" i="1">
+                              <a:latin typeface="Cambria Math" panose="02040503050406030204" pitchFamily="18" charset="0"/>
+                            </a:rPr>
                           </m:ctrlPr>
                         </m:dPr>
                         <m:e>
@@ -6115,7 +6431,9 @@
                                 </m:mc>
                               </m:mcs>
                               <m:ctrlPr>
-                                <a:rPr lang="it-IT" sz="2000"/>
+                                <a:rPr lang="it-IT" sz="2000" i="1">
+                                  <a:latin typeface="Cambria Math" panose="02040503050406030204" pitchFamily="18" charset="0"/>
+                                </a:rPr>
                               </m:ctrlPr>
                             </m:mPr>
                             <m:mr>
@@ -6124,15 +6442,21 @@
                                   <m:rPr>
                                     <m:brk m:alnAt="7"/>
                                   </m:rPr>
-                                  <a:rPr lang="it-IT" sz="2000"/>
+                                  <a:rPr lang="it-IT" sz="2000">
+                                    <a:latin typeface="Cambria Math" panose="02040503050406030204" pitchFamily="18" charset="0"/>
+                                  </a:rPr>
                                   <m:t>−</m:t>
                                 </m:r>
                                 <m:r>
-                                  <a:rPr lang="it-IT" sz="2000"/>
+                                  <a:rPr lang="it-IT" sz="2000">
+                                    <a:latin typeface="Cambria Math" panose="02040503050406030204" pitchFamily="18" charset="0"/>
+                                  </a:rPr>
                                   <m:t>75.2085 + 7.4473</m:t>
                                 </m:r>
                                 <m:r>
-                                  <a:rPr lang="it-IT" sz="2000"/>
+                                  <a:rPr lang="it-IT" sz="2000">
+                                    <a:latin typeface="Cambria Math" panose="02040503050406030204" pitchFamily="18" charset="0"/>
+                                  </a:rPr>
                                   <m:t>𝑖</m:t>
                                 </m:r>
                               </m:e>
@@ -6140,11 +6464,15 @@
                             <m:mr>
                               <m:e>
                                 <m:r>
-                                  <a:rPr lang="it-IT" sz="2000"/>
+                                  <a:rPr lang="it-IT" sz="2000">
+                                    <a:latin typeface="Cambria Math" panose="02040503050406030204" pitchFamily="18" charset="0"/>
+                                  </a:rPr>
                                   <m:t>−75.2085 − 7.4473</m:t>
                                 </m:r>
                                 <m:r>
-                                  <a:rPr lang="it-IT" sz="2000"/>
+                                  <a:rPr lang="it-IT" sz="2000">
+                                    <a:latin typeface="Cambria Math" panose="02040503050406030204" pitchFamily="18" charset="0"/>
+                                  </a:rPr>
                                   <m:t>𝑖</m:t>
                                 </m:r>
                               </m:e>
@@ -6160,7 +6488,7 @@
             </p:txBody>
           </p:sp>
         </mc:Choice>
-        <mc:Fallback>
+        <mc:Fallback xmlns="">
           <p:sp>
             <p:nvSpPr>
               <p:cNvPr id="14" name="CasellaDiTesto 13">
@@ -6878,7 +7206,7 @@
                 </a14:m>
                 <a:r>
                   <a:rPr lang="it-IT" b="1" dirty="0"/>
-                  <a:t>= 2.5mm</a:t>
+                  <a:t>= 2.5mm corrispondente a 15V in ingresso</a:t>
                 </a:r>
               </a:p>
               <a:p>
@@ -7774,7 +8102,7 @@
               <a:blipFill>
                 <a:blip r:embed="rId2"/>
                 <a:stretch>
-                  <a:fillRect/>
+                  <a:fillRect l="-1043" t="-2381" r="-1391"/>
                 </a:stretch>
               </a:blipFill>
             </p:spPr>
@@ -7821,8 +8149,8 @@
         </p:blipFill>
         <p:spPr>
           <a:xfrm>
-            <a:off x="3871785" y="2248399"/>
-            <a:ext cx="5886812" cy="4415109"/>
+            <a:off x="4999702" y="2713540"/>
+            <a:ext cx="5039113" cy="3779335"/>
           </a:xfrm>
           <a:prstGeom prst="rect">
             <a:avLst/>

--- a/Poli per caso/midterm presentazione/Controllo in cascata chiaro.pptx
+++ b/Poli per caso/midterm presentazione/Controllo in cascata chiaro.pptx
@@ -5,7 +5,7 @@
     <p:sldMasterId id="2147483678" r:id="rId1"/>
   </p:sldMasterIdLst>
   <p:notesMasterIdLst>
-    <p:notesMasterId r:id="rId24"/>
+    <p:notesMasterId r:id="rId29"/>
   </p:notesMasterIdLst>
   <p:sldIdLst>
     <p:sldId id="256" r:id="rId2"/>
@@ -30,6 +30,11 @@
     <p:sldId id="269" r:id="rId21"/>
     <p:sldId id="281" r:id="rId22"/>
     <p:sldId id="262" r:id="rId23"/>
+    <p:sldId id="282" r:id="rId24"/>
+    <p:sldId id="285" r:id="rId25"/>
+    <p:sldId id="283" r:id="rId26"/>
+    <p:sldId id="286" r:id="rId27"/>
+    <p:sldId id="284" r:id="rId28"/>
   </p:sldIdLst>
   <p:sldSz cx="12192000" cy="6858000"/>
   <p:notesSz cx="6858000" cy="9144000"/>
@@ -5692,7 +5697,7 @@
           <a:p>
             <a:r>
               <a:rPr lang="it-IT" sz="3600" dirty="0"/>
-              <a:t>Controllo esterno 2 anelli: controllore più compensatore</a:t>
+              <a:t>Possibili correzioni</a:t>
             </a:r>
           </a:p>
         </p:txBody>
@@ -5718,7 +5723,38 @@
           <a:bodyPr/>
           <a:lstStyle/>
           <a:p>
-            <a:endParaRPr lang="it-IT" dirty="0"/>
+            <a:r>
+              <a:rPr lang="it-IT" dirty="0"/>
+              <a:t>Invece di usare due anelli esterni uno stabilizza senza preoccuparsi del tracking e poi un </a:t>
+            </a:r>
+            <a:r>
+              <a:rPr lang="it-IT" dirty="0" err="1"/>
+              <a:t>feedforward</a:t>
+            </a:r>
+            <a:r>
+              <a:rPr lang="it-IT" dirty="0"/>
+              <a:t> </a:t>
+            </a:r>
+            <a:r>
+              <a:rPr lang="it-IT" dirty="0" err="1"/>
+              <a:t>static</a:t>
+            </a:r>
+            <a:r>
+              <a:rPr lang="it-IT" dirty="0"/>
+              <a:t> gain per avvicinarsi al punto di linearizzazione</a:t>
+            </a:r>
+          </a:p>
+          <a:p>
+            <a:r>
+              <a:rPr lang="it-IT" dirty="0"/>
+              <a:t>Fare un controllore piu lento che sia meno influenzato dall’anello interno</a:t>
+            </a:r>
+          </a:p>
+          <a:p>
+            <a:r>
+              <a:rPr lang="it-IT" dirty="0"/>
+              <a:t>Cambiare punto di equilibrio, controllare linearizzazione modello</a:t>
+            </a:r>
           </a:p>
         </p:txBody>
       </p:sp>
@@ -5726,6 +5762,728 @@
     <p:extLst>
       <p:ext uri="{BB962C8B-B14F-4D97-AF65-F5344CB8AC3E}">
         <p14:creationId xmlns:p14="http://schemas.microsoft.com/office/powerpoint/2010/main" val="2045346173"/>
+      </p:ext>
+    </p:extLst>
+  </p:cSld>
+  <p:clrMapOvr>
+    <a:masterClrMapping/>
+  </p:clrMapOvr>
+</p:sld>
+</file>
+
+<file path=ppt/slides/slide23.xml><?xml version="1.0" encoding="utf-8"?>
+<p:sld xmlns:a="http://schemas.openxmlformats.org/drawingml/2006/main" xmlns:r="http://schemas.openxmlformats.org/officeDocument/2006/relationships" xmlns:p="http://schemas.openxmlformats.org/presentationml/2006/main">
+  <p:cSld>
+    <p:spTree>
+      <p:nvGrpSpPr>
+        <p:cNvPr id="1" name=""/>
+        <p:cNvGrpSpPr/>
+        <p:nvPr/>
+      </p:nvGrpSpPr>
+      <p:grpSpPr>
+        <a:xfrm>
+          <a:off x="0" y="0"/>
+          <a:ext cx="0" cy="0"/>
+          <a:chOff x="0" y="0"/>
+          <a:chExt cx="0" cy="0"/>
+        </a:xfrm>
+      </p:grpSpPr>
+      <p:sp>
+        <p:nvSpPr>
+          <p:cNvPr id="2" name="Titolo 1">
+            <a:extLst>
+              <a:ext uri="{FF2B5EF4-FFF2-40B4-BE49-F238E27FC236}">
+                <a16:creationId xmlns:a16="http://schemas.microsoft.com/office/drawing/2014/main" id="{3C2389B3-7080-048C-BF8C-42F9849D79A6}"/>
+              </a:ext>
+            </a:extLst>
+          </p:cNvPr>
+          <p:cNvSpPr>
+            <a:spLocks noGrp="1"/>
+          </p:cNvSpPr>
+          <p:nvPr>
+            <p:ph type="title"/>
+          </p:nvPr>
+        </p:nvSpPr>
+        <p:spPr/>
+        <p:txBody>
+          <a:bodyPr/>
+          <a:lstStyle/>
+          <a:p>
+            <a:r>
+              <a:rPr lang="it-IT" dirty="0"/>
+              <a:t>Controllore piu lento</a:t>
+            </a:r>
+          </a:p>
+        </p:txBody>
+      </p:sp>
+      <mc:AlternateContent xmlns:mc="http://schemas.openxmlformats.org/markup-compatibility/2006">
+        <mc:Choice xmlns:a14="http://schemas.microsoft.com/office/drawing/2010/main" Requires="a14">
+          <p:sp>
+            <p:nvSpPr>
+              <p:cNvPr id="3" name="Segnaposto contenuto 2">
+                <a:extLst>
+                  <a:ext uri="{FF2B5EF4-FFF2-40B4-BE49-F238E27FC236}">
+                    <a16:creationId xmlns:a16="http://schemas.microsoft.com/office/drawing/2014/main" id="{A0634C28-0BD9-53CE-5D30-F268A1DE79FD}"/>
+                  </a:ext>
+                </a:extLst>
+              </p:cNvPr>
+              <p:cNvSpPr>
+                <a:spLocks noGrp="1"/>
+              </p:cNvSpPr>
+              <p:nvPr>
+                <p:ph idx="1"/>
+              </p:nvPr>
+            </p:nvSpPr>
+            <p:spPr/>
+            <p:txBody>
+              <a:bodyPr/>
+              <a:lstStyle/>
+              <a:p>
+                <a:r>
+                  <a:rPr lang="it-IT" dirty="0"/>
+                  <a:t>Anello stabilizzante. </a:t>
+                </a:r>
+                <a14:m>
+                  <m:oMath xmlns:m="http://schemas.openxmlformats.org/officeDocument/2006/math">
+                    <m:sSub>
+                      <m:sSubPr>
+                        <m:ctrlPr>
+                          <a:rPr lang="it-IT" i="1" smtClean="0">
+                            <a:latin typeface="Cambria Math" panose="02040503050406030204" pitchFamily="18" charset="0"/>
+                          </a:rPr>
+                        </m:ctrlPr>
+                      </m:sSubPr>
+                      <m:e>
+                        <m:r>
+                          <a:rPr lang="it-IT" b="0" i="1" smtClean="0">
+                            <a:latin typeface="Cambria Math" panose="02040503050406030204" pitchFamily="18" charset="0"/>
+                          </a:rPr>
+                          <m:t>𝑤</m:t>
+                        </m:r>
+                      </m:e>
+                      <m:sub>
+                        <m:r>
+                          <a:rPr lang="it-IT" b="0" i="1" smtClean="0">
+                            <a:latin typeface="Cambria Math" panose="02040503050406030204" pitchFamily="18" charset="0"/>
+                          </a:rPr>
+                          <m:t>𝑐</m:t>
+                        </m:r>
+                      </m:sub>
+                    </m:sSub>
+                    <m:r>
+                      <a:rPr lang="it-IT" b="0" i="1" smtClean="0">
+                        <a:latin typeface="Cambria Math" panose="02040503050406030204" pitchFamily="18" charset="0"/>
+                      </a:rPr>
+                      <m:t>=18</m:t>
+                    </m:r>
+                    <m:r>
+                      <a:rPr lang="it-IT" b="0" i="1" smtClean="0">
+                        <a:latin typeface="Cambria Math" panose="02040503050406030204" pitchFamily="18" charset="0"/>
+                      </a:rPr>
+                      <m:t>𝑟𝑎𝑑</m:t>
+                    </m:r>
+                    <m:r>
+                      <a:rPr lang="it-IT" b="0" i="1" smtClean="0">
+                        <a:latin typeface="Cambria Math" panose="02040503050406030204" pitchFamily="18" charset="0"/>
+                      </a:rPr>
+                      <m:t>/</m:t>
+                    </m:r>
+                    <m:r>
+                      <a:rPr lang="it-IT" b="0" i="1" smtClean="0">
+                        <a:latin typeface="Cambria Math" panose="02040503050406030204" pitchFamily="18" charset="0"/>
+                      </a:rPr>
+                      <m:t>𝑠</m:t>
+                    </m:r>
+                  </m:oMath>
+                </a14:m>
+                <a:r>
+                  <a:rPr lang="it-IT" dirty="0"/>
+                  <a:t> ma margine di fase 9.2°</a:t>
+                </a:r>
+              </a:p>
+            </p:txBody>
+          </p:sp>
+        </mc:Choice>
+        <mc:Fallback>
+          <p:sp>
+            <p:nvSpPr>
+              <p:cNvPr id="3" name="Segnaposto contenuto 2">
+                <a:extLst>
+                  <a:ext uri="{FF2B5EF4-FFF2-40B4-BE49-F238E27FC236}">
+                    <a16:creationId xmlns:a16="http://schemas.microsoft.com/office/drawing/2014/main" id="{A0634C28-0BD9-53CE-5D30-F268A1DE79FD}"/>
+                  </a:ext>
+                </a:extLst>
+              </p:cNvPr>
+              <p:cNvSpPr>
+                <a:spLocks noGrp="1" noRot="1" noChangeAspect="1" noMove="1" noResize="1" noEditPoints="1" noAdjustHandles="1" noChangeArrowheads="1" noChangeShapeType="1" noTextEdit="1"/>
+              </p:cNvSpPr>
+              <p:nvPr>
+                <p:ph idx="1"/>
+              </p:nvPr>
+            </p:nvSpPr>
+            <p:spPr>
+              <a:blipFill>
+                <a:blip r:embed="rId2"/>
+                <a:stretch>
+                  <a:fillRect l="-1043" t="-2381"/>
+                </a:stretch>
+              </a:blipFill>
+            </p:spPr>
+            <p:txBody>
+              <a:bodyPr/>
+              <a:lstStyle/>
+              <a:p>
+                <a:r>
+                  <a:rPr lang="it-IT">
+                    <a:noFill/>
+                  </a:rPr>
+                  <a:t> </a:t>
+                </a:r>
+              </a:p>
+            </p:txBody>
+          </p:sp>
+        </mc:Fallback>
+      </mc:AlternateContent>
+      <p:pic>
+        <p:nvPicPr>
+          <p:cNvPr id="5" name="Immagine 4" descr="Immagine che contiene testo, linea, schermata, Diagramma&#10;&#10;Il contenuto generato dall'IA potrebbe non essere corretto.">
+            <a:extLst>
+              <a:ext uri="{FF2B5EF4-FFF2-40B4-BE49-F238E27FC236}">
+                <a16:creationId xmlns:a16="http://schemas.microsoft.com/office/drawing/2014/main" id="{058FC24A-55A9-FA6A-C320-D8229CC40A01}"/>
+              </a:ext>
+            </a:extLst>
+          </p:cNvPr>
+          <p:cNvPicPr>
+            <a:picLocks noChangeAspect="1"/>
+          </p:cNvPicPr>
+          <p:nvPr/>
+        </p:nvPicPr>
+        <p:blipFill>
+          <a:blip r:embed="rId3">
+            <a:extLst>
+              <a:ext uri="{28A0092B-C50C-407E-A947-70E740481C1C}">
+                <a14:useLocalDpi xmlns:a14="http://schemas.microsoft.com/office/drawing/2010/main" val="0"/>
+              </a:ext>
+            </a:extLst>
+          </a:blip>
+          <a:stretch>
+            <a:fillRect/>
+          </a:stretch>
+        </p:blipFill>
+        <p:spPr>
+          <a:xfrm>
+            <a:off x="1831524" y="2747244"/>
+            <a:ext cx="8528951" cy="3745631"/>
+          </a:xfrm>
+          <a:prstGeom prst="rect">
+            <a:avLst/>
+          </a:prstGeom>
+        </p:spPr>
+      </p:pic>
+    </p:spTree>
+    <p:extLst>
+      <p:ext uri="{BB962C8B-B14F-4D97-AF65-F5344CB8AC3E}">
+        <p14:creationId xmlns:p14="http://schemas.microsoft.com/office/powerpoint/2010/main" val="1329212390"/>
+      </p:ext>
+    </p:extLst>
+  </p:cSld>
+  <p:clrMapOvr>
+    <a:masterClrMapping/>
+  </p:clrMapOvr>
+</p:sld>
+</file>
+
+<file path=ppt/slides/slide24.xml><?xml version="1.0" encoding="utf-8"?>
+<p:sld xmlns:a="http://schemas.openxmlformats.org/drawingml/2006/main" xmlns:r="http://schemas.openxmlformats.org/officeDocument/2006/relationships" xmlns:p="http://schemas.openxmlformats.org/presentationml/2006/main">
+  <p:cSld>
+    <p:spTree>
+      <p:nvGrpSpPr>
+        <p:cNvPr id="1" name=""/>
+        <p:cNvGrpSpPr/>
+        <p:nvPr/>
+      </p:nvGrpSpPr>
+      <p:grpSpPr>
+        <a:xfrm>
+          <a:off x="0" y="0"/>
+          <a:ext cx="0" cy="0"/>
+          <a:chOff x="0" y="0"/>
+          <a:chExt cx="0" cy="0"/>
+        </a:xfrm>
+      </p:grpSpPr>
+      <p:sp>
+        <p:nvSpPr>
+          <p:cNvPr id="2" name="Titolo 1">
+            <a:extLst>
+              <a:ext uri="{FF2B5EF4-FFF2-40B4-BE49-F238E27FC236}">
+                <a16:creationId xmlns:a16="http://schemas.microsoft.com/office/drawing/2014/main" id="{D39FB6B6-3213-B4E8-B74F-C2D1C2C9C5FD}"/>
+              </a:ext>
+            </a:extLst>
+          </p:cNvPr>
+          <p:cNvSpPr>
+            <a:spLocks noGrp="1"/>
+          </p:cNvSpPr>
+          <p:nvPr>
+            <p:ph type="title"/>
+          </p:nvPr>
+        </p:nvSpPr>
+        <p:spPr/>
+        <p:txBody>
+          <a:bodyPr/>
+          <a:lstStyle/>
+          <a:p>
+            <a:r>
+              <a:rPr lang="it-IT" dirty="0"/>
+              <a:t>Risposta allo scalino anello stabilizzante</a:t>
+            </a:r>
+          </a:p>
+        </p:txBody>
+      </p:sp>
+      <p:pic>
+        <p:nvPicPr>
+          <p:cNvPr id="5" name="Segnaposto contenuto 4" descr="Immagine che contiene testo, linea, Diagramma, diagramma&#10;&#10;Il contenuto generato dall'IA potrebbe non essere corretto.">
+            <a:extLst>
+              <a:ext uri="{FF2B5EF4-FFF2-40B4-BE49-F238E27FC236}">
+                <a16:creationId xmlns:a16="http://schemas.microsoft.com/office/drawing/2014/main" id="{934BB0D7-9DAB-C256-AEEA-E5B8CE4A2F88}"/>
+              </a:ext>
+            </a:extLst>
+          </p:cNvPr>
+          <p:cNvPicPr>
+            <a:picLocks noGrp="1" noChangeAspect="1"/>
+          </p:cNvPicPr>
+          <p:nvPr>
+            <p:ph idx="1"/>
+          </p:nvPr>
+        </p:nvPicPr>
+        <p:blipFill>
+          <a:blip r:embed="rId2">
+            <a:extLst>
+              <a:ext uri="{28A0092B-C50C-407E-A947-70E740481C1C}">
+                <a14:useLocalDpi xmlns:a14="http://schemas.microsoft.com/office/drawing/2010/main" val="0"/>
+              </a:ext>
+            </a:extLst>
+          </a:blip>
+          <a:stretch>
+            <a:fillRect/>
+          </a:stretch>
+        </p:blipFill>
+        <p:spPr>
+          <a:xfrm>
+            <a:off x="1377883" y="1825625"/>
+            <a:ext cx="9436234" cy="4351338"/>
+          </a:xfrm>
+        </p:spPr>
+      </p:pic>
+    </p:spTree>
+    <p:extLst>
+      <p:ext uri="{BB962C8B-B14F-4D97-AF65-F5344CB8AC3E}">
+        <p14:creationId xmlns:p14="http://schemas.microsoft.com/office/powerpoint/2010/main" val="4121350950"/>
+      </p:ext>
+    </p:extLst>
+  </p:cSld>
+  <p:clrMapOvr>
+    <a:masterClrMapping/>
+  </p:clrMapOvr>
+</p:sld>
+</file>
+
+<file path=ppt/slides/slide25.xml><?xml version="1.0" encoding="utf-8"?>
+<p:sld xmlns:a="http://schemas.openxmlformats.org/drawingml/2006/main" xmlns:r="http://schemas.openxmlformats.org/officeDocument/2006/relationships" xmlns:p="http://schemas.openxmlformats.org/presentationml/2006/main">
+  <p:cSld>
+    <p:spTree>
+      <p:nvGrpSpPr>
+        <p:cNvPr id="1" name=""/>
+        <p:cNvGrpSpPr/>
+        <p:nvPr/>
+      </p:nvGrpSpPr>
+      <p:grpSpPr>
+        <a:xfrm>
+          <a:off x="0" y="0"/>
+          <a:ext cx="0" cy="0"/>
+          <a:chOff x="0" y="0"/>
+          <a:chExt cx="0" cy="0"/>
+        </a:xfrm>
+      </p:grpSpPr>
+      <p:sp>
+        <p:nvSpPr>
+          <p:cNvPr id="2" name="Titolo 1">
+            <a:extLst>
+              <a:ext uri="{FF2B5EF4-FFF2-40B4-BE49-F238E27FC236}">
+                <a16:creationId xmlns:a16="http://schemas.microsoft.com/office/drawing/2014/main" id="{32856509-1C86-4EE5-8609-AD85C6F1D5F1}"/>
+              </a:ext>
+            </a:extLst>
+          </p:cNvPr>
+          <p:cNvSpPr>
+            <a:spLocks noGrp="1"/>
+          </p:cNvSpPr>
+          <p:nvPr>
+            <p:ph type="title"/>
+          </p:nvPr>
+        </p:nvSpPr>
+        <p:spPr/>
+        <p:txBody>
+          <a:bodyPr/>
+          <a:lstStyle/>
+          <a:p>
+            <a:r>
+              <a:rPr lang="it-IT" dirty="0"/>
+              <a:t>Controllore lento</a:t>
+            </a:r>
+          </a:p>
+        </p:txBody>
+      </p:sp>
+      <mc:AlternateContent xmlns:mc="http://schemas.openxmlformats.org/markup-compatibility/2006">
+        <mc:Choice xmlns:a14="http://schemas.microsoft.com/office/drawing/2010/main" Requires="a14">
+          <p:sp>
+            <p:nvSpPr>
+              <p:cNvPr id="3" name="Segnaposto contenuto 2">
+                <a:extLst>
+                  <a:ext uri="{FF2B5EF4-FFF2-40B4-BE49-F238E27FC236}">
+                    <a16:creationId xmlns:a16="http://schemas.microsoft.com/office/drawing/2014/main" id="{0E7F9A77-F925-E997-5498-7F7B9C46407B}"/>
+                  </a:ext>
+                </a:extLst>
+              </p:cNvPr>
+              <p:cNvSpPr>
+                <a:spLocks noGrp="1"/>
+              </p:cNvSpPr>
+              <p:nvPr>
+                <p:ph idx="1"/>
+              </p:nvPr>
+            </p:nvSpPr>
+            <p:spPr/>
+            <p:txBody>
+              <a:bodyPr/>
+              <a:lstStyle/>
+              <a:p>
+                <a:r>
+                  <a:rPr lang="it-IT" dirty="0"/>
+                  <a:t>Anello di tracking. </a:t>
+                </a:r>
+                <a14:m>
+                  <m:oMath xmlns:m="http://schemas.openxmlformats.org/officeDocument/2006/math">
+                    <m:sSub>
+                      <m:sSubPr>
+                        <m:ctrlPr>
+                          <a:rPr lang="it-IT" i="1" smtClean="0">
+                            <a:latin typeface="Cambria Math" panose="02040503050406030204" pitchFamily="18" charset="0"/>
+                          </a:rPr>
+                        </m:ctrlPr>
+                      </m:sSubPr>
+                      <m:e>
+                        <m:r>
+                          <a:rPr lang="it-IT" b="0" i="1" smtClean="0">
+                            <a:latin typeface="Cambria Math" panose="02040503050406030204" pitchFamily="18" charset="0"/>
+                          </a:rPr>
+                          <m:t>𝑤</m:t>
+                        </m:r>
+                      </m:e>
+                      <m:sub>
+                        <m:r>
+                          <a:rPr lang="it-IT" b="0" i="1" smtClean="0">
+                            <a:latin typeface="Cambria Math" panose="02040503050406030204" pitchFamily="18" charset="0"/>
+                          </a:rPr>
+                          <m:t>𝑐</m:t>
+                        </m:r>
+                      </m:sub>
+                    </m:sSub>
+                    <m:r>
+                      <a:rPr lang="it-IT" b="0" i="1" smtClean="0">
+                        <a:latin typeface="Cambria Math" panose="02040503050406030204" pitchFamily="18" charset="0"/>
+                      </a:rPr>
+                      <m:t>=1.62</m:t>
+                    </m:r>
+                  </m:oMath>
+                </a14:m>
+                <a:r>
+                  <a:rPr lang="it-IT" dirty="0"/>
+                  <a:t>, e </a:t>
+                </a:r>
+                <a:r>
+                  <a:rPr lang="it-IT" dirty="0" err="1"/>
+                  <a:t>magine</a:t>
+                </a:r>
+                <a:r>
+                  <a:rPr lang="it-IT" dirty="0"/>
+                  <a:t> di fase 87.6°</a:t>
+                </a:r>
+              </a:p>
+            </p:txBody>
+          </p:sp>
+        </mc:Choice>
+        <mc:Fallback>
+          <p:sp>
+            <p:nvSpPr>
+              <p:cNvPr id="3" name="Segnaposto contenuto 2">
+                <a:extLst>
+                  <a:ext uri="{FF2B5EF4-FFF2-40B4-BE49-F238E27FC236}">
+                    <a16:creationId xmlns:a16="http://schemas.microsoft.com/office/drawing/2014/main" id="{0E7F9A77-F925-E997-5498-7F7B9C46407B}"/>
+                  </a:ext>
+                </a:extLst>
+              </p:cNvPr>
+              <p:cNvSpPr>
+                <a:spLocks noGrp="1" noRot="1" noChangeAspect="1" noMove="1" noResize="1" noEditPoints="1" noAdjustHandles="1" noChangeArrowheads="1" noChangeShapeType="1" noTextEdit="1"/>
+              </p:cNvSpPr>
+              <p:nvPr>
+                <p:ph idx="1"/>
+              </p:nvPr>
+            </p:nvSpPr>
+            <p:spPr>
+              <a:blipFill>
+                <a:blip r:embed="rId2"/>
+                <a:stretch>
+                  <a:fillRect l="-1043" t="-2381"/>
+                </a:stretch>
+              </a:blipFill>
+            </p:spPr>
+            <p:txBody>
+              <a:bodyPr/>
+              <a:lstStyle/>
+              <a:p>
+                <a:r>
+                  <a:rPr lang="it-IT">
+                    <a:noFill/>
+                  </a:rPr>
+                  <a:t> </a:t>
+                </a:r>
+              </a:p>
+            </p:txBody>
+          </p:sp>
+        </mc:Fallback>
+      </mc:AlternateContent>
+      <p:pic>
+        <p:nvPicPr>
+          <p:cNvPr id="5" name="Immagine 4" descr="Immagine che contiene linea, Diagramma, testo, diagramma&#10;&#10;Il contenuto generato dall'IA potrebbe non essere corretto.">
+            <a:extLst>
+              <a:ext uri="{FF2B5EF4-FFF2-40B4-BE49-F238E27FC236}">
+                <a16:creationId xmlns:a16="http://schemas.microsoft.com/office/drawing/2014/main" id="{85E7EDAE-8F7B-E696-7649-47897D882ABF}"/>
+              </a:ext>
+            </a:extLst>
+          </p:cNvPr>
+          <p:cNvPicPr>
+            <a:picLocks noChangeAspect="1"/>
+          </p:cNvPicPr>
+          <p:nvPr/>
+        </p:nvPicPr>
+        <p:blipFill>
+          <a:blip r:embed="rId3">
+            <a:extLst>
+              <a:ext uri="{28A0092B-C50C-407E-A947-70E740481C1C}">
+                <a14:useLocalDpi xmlns:a14="http://schemas.microsoft.com/office/drawing/2010/main" val="0"/>
+              </a:ext>
+            </a:extLst>
+          </a:blip>
+          <a:stretch>
+            <a:fillRect/>
+          </a:stretch>
+        </p:blipFill>
+        <p:spPr>
+          <a:xfrm>
+            <a:off x="2413416" y="2531634"/>
+            <a:ext cx="9236434" cy="4150851"/>
+          </a:xfrm>
+          <a:prstGeom prst="rect">
+            <a:avLst/>
+          </a:prstGeom>
+        </p:spPr>
+      </p:pic>
+    </p:spTree>
+    <p:extLst>
+      <p:ext uri="{BB962C8B-B14F-4D97-AF65-F5344CB8AC3E}">
+        <p14:creationId xmlns:p14="http://schemas.microsoft.com/office/powerpoint/2010/main" val="2474587858"/>
+      </p:ext>
+    </p:extLst>
+  </p:cSld>
+  <p:clrMapOvr>
+    <a:masterClrMapping/>
+  </p:clrMapOvr>
+</p:sld>
+</file>
+
+<file path=ppt/slides/slide26.xml><?xml version="1.0" encoding="utf-8"?>
+<p:sld xmlns:a="http://schemas.openxmlformats.org/drawingml/2006/main" xmlns:r="http://schemas.openxmlformats.org/officeDocument/2006/relationships" xmlns:p="http://schemas.openxmlformats.org/presentationml/2006/main">
+  <p:cSld>
+    <p:spTree>
+      <p:nvGrpSpPr>
+        <p:cNvPr id="1" name=""/>
+        <p:cNvGrpSpPr/>
+        <p:nvPr/>
+      </p:nvGrpSpPr>
+      <p:grpSpPr>
+        <a:xfrm>
+          <a:off x="0" y="0"/>
+          <a:ext cx="0" cy="0"/>
+          <a:chOff x="0" y="0"/>
+          <a:chExt cx="0" cy="0"/>
+        </a:xfrm>
+      </p:grpSpPr>
+      <p:sp>
+        <p:nvSpPr>
+          <p:cNvPr id="2" name="Titolo 1">
+            <a:extLst>
+              <a:ext uri="{FF2B5EF4-FFF2-40B4-BE49-F238E27FC236}">
+                <a16:creationId xmlns:a16="http://schemas.microsoft.com/office/drawing/2014/main" id="{39C50CC3-8F4E-9D0B-5E23-5EF0D9D44438}"/>
+              </a:ext>
+            </a:extLst>
+          </p:cNvPr>
+          <p:cNvSpPr>
+            <a:spLocks noGrp="1"/>
+          </p:cNvSpPr>
+          <p:nvPr>
+            <p:ph type="title"/>
+          </p:nvPr>
+        </p:nvSpPr>
+        <p:spPr/>
+        <p:txBody>
+          <a:bodyPr/>
+          <a:lstStyle/>
+          <a:p>
+            <a:r>
+              <a:rPr lang="it-IT" dirty="0"/>
+              <a:t>Risposta allo scalino del </a:t>
+            </a:r>
+            <a:r>
+              <a:rPr lang="it-IT" dirty="0" err="1"/>
+              <a:t>tacking</a:t>
+            </a:r>
+            <a:endParaRPr lang="it-IT" dirty="0"/>
+          </a:p>
+        </p:txBody>
+      </p:sp>
+      <p:pic>
+        <p:nvPicPr>
+          <p:cNvPr id="9" name="Segnaposto contenuto 8" descr="Immagine che contiene testo, linea, diagramma, Diagramma&#10;&#10;Il contenuto generato dall'IA potrebbe non essere corretto.">
+            <a:extLst>
+              <a:ext uri="{FF2B5EF4-FFF2-40B4-BE49-F238E27FC236}">
+                <a16:creationId xmlns:a16="http://schemas.microsoft.com/office/drawing/2014/main" id="{BB484044-01CA-175D-0738-A43F39A62844}"/>
+              </a:ext>
+            </a:extLst>
+          </p:cNvPr>
+          <p:cNvPicPr>
+            <a:picLocks noGrp="1" noChangeAspect="1"/>
+          </p:cNvPicPr>
+          <p:nvPr>
+            <p:ph idx="1"/>
+          </p:nvPr>
+        </p:nvPicPr>
+        <p:blipFill>
+          <a:blip r:embed="rId2">
+            <a:extLst>
+              <a:ext uri="{28A0092B-C50C-407E-A947-70E740481C1C}">
+                <a14:useLocalDpi xmlns:a14="http://schemas.microsoft.com/office/drawing/2010/main" val="0"/>
+              </a:ext>
+            </a:extLst>
+          </a:blip>
+          <a:stretch>
+            <a:fillRect/>
+          </a:stretch>
+        </p:blipFill>
+        <p:spPr>
+          <a:xfrm>
+            <a:off x="1318716" y="1825625"/>
+            <a:ext cx="9554568" cy="4351338"/>
+          </a:xfrm>
+        </p:spPr>
+      </p:pic>
+    </p:spTree>
+    <p:extLst>
+      <p:ext uri="{BB962C8B-B14F-4D97-AF65-F5344CB8AC3E}">
+        <p14:creationId xmlns:p14="http://schemas.microsoft.com/office/powerpoint/2010/main" val="1164562578"/>
+      </p:ext>
+    </p:extLst>
+  </p:cSld>
+  <p:clrMapOvr>
+    <a:masterClrMapping/>
+  </p:clrMapOvr>
+</p:sld>
+</file>
+
+<file path=ppt/slides/slide27.xml><?xml version="1.0" encoding="utf-8"?>
+<p:sld xmlns:a="http://schemas.openxmlformats.org/drawingml/2006/main" xmlns:r="http://schemas.openxmlformats.org/officeDocument/2006/relationships" xmlns:p="http://schemas.openxmlformats.org/presentationml/2006/main">
+  <p:cSld>
+    <p:spTree>
+      <p:nvGrpSpPr>
+        <p:cNvPr id="1" name=""/>
+        <p:cNvGrpSpPr/>
+        <p:nvPr/>
+      </p:nvGrpSpPr>
+      <p:grpSpPr>
+        <a:xfrm>
+          <a:off x="0" y="0"/>
+          <a:ext cx="0" cy="0"/>
+          <a:chOff x="0" y="0"/>
+          <a:chExt cx="0" cy="0"/>
+        </a:xfrm>
+      </p:grpSpPr>
+      <p:sp>
+        <p:nvSpPr>
+          <p:cNvPr id="2" name="Titolo 1">
+            <a:extLst>
+              <a:ext uri="{FF2B5EF4-FFF2-40B4-BE49-F238E27FC236}">
+                <a16:creationId xmlns:a16="http://schemas.microsoft.com/office/drawing/2014/main" id="{B208EB54-82A7-C57C-FFD4-1183C6164BF7}"/>
+              </a:ext>
+            </a:extLst>
+          </p:cNvPr>
+          <p:cNvSpPr>
+            <a:spLocks noGrp="1"/>
+          </p:cNvSpPr>
+          <p:nvPr>
+            <p:ph type="title"/>
+          </p:nvPr>
+        </p:nvSpPr>
+        <p:spPr/>
+        <p:txBody>
+          <a:bodyPr/>
+          <a:lstStyle/>
+          <a:p>
+            <a:r>
+              <a:rPr lang="it-IT" dirty="0" err="1"/>
+              <a:t>Simulink</a:t>
+            </a:r>
+            <a:r>
+              <a:rPr lang="it-IT" dirty="0"/>
+              <a:t> della risposta lenta</a:t>
+            </a:r>
+          </a:p>
+        </p:txBody>
+      </p:sp>
+      <p:pic>
+        <p:nvPicPr>
+          <p:cNvPr id="5" name="Segnaposto contenuto 4" descr="Immagine che contiene schermata, linea, Diagramma&#10;&#10;Il contenuto generato dall'IA potrebbe non essere corretto.">
+            <a:extLst>
+              <a:ext uri="{FF2B5EF4-FFF2-40B4-BE49-F238E27FC236}">
+                <a16:creationId xmlns:a16="http://schemas.microsoft.com/office/drawing/2014/main" id="{DC48E3DC-59A1-6E02-6706-1E542810953D}"/>
+              </a:ext>
+            </a:extLst>
+          </p:cNvPr>
+          <p:cNvPicPr>
+            <a:picLocks noGrp="1" noChangeAspect="1"/>
+          </p:cNvPicPr>
+          <p:nvPr>
+            <p:ph idx="1"/>
+          </p:nvPr>
+        </p:nvPicPr>
+        <p:blipFill>
+          <a:blip r:embed="rId2">
+            <a:extLst>
+              <a:ext uri="{28A0092B-C50C-407E-A947-70E740481C1C}">
+                <a14:useLocalDpi xmlns:a14="http://schemas.microsoft.com/office/drawing/2010/main" val="0"/>
+              </a:ext>
+            </a:extLst>
+          </a:blip>
+          <a:stretch>
+            <a:fillRect/>
+          </a:stretch>
+        </p:blipFill>
+        <p:spPr>
+          <a:xfrm>
+            <a:off x="1338257" y="1825625"/>
+            <a:ext cx="9515485" cy="4351338"/>
+          </a:xfrm>
+        </p:spPr>
+      </p:pic>
+    </p:spTree>
+    <p:extLst>
+      <p:ext uri="{BB962C8B-B14F-4D97-AF65-F5344CB8AC3E}">
+        <p14:creationId xmlns:p14="http://schemas.microsoft.com/office/powerpoint/2010/main" val="1118475900"/>
       </p:ext>
     </p:extLst>
   </p:cSld>
@@ -7131,8 +7889,8 @@
           </a:p>
         </p:txBody>
       </p:sp>
-      <mc:AlternateContent xmlns:mc="http://schemas.openxmlformats.org/markup-compatibility/2006">
-        <mc:Choice xmlns:a14="http://schemas.microsoft.com/office/drawing/2010/main" Requires="a14">
+      <mc:AlternateContent xmlns:mc="http://schemas.openxmlformats.org/markup-compatibility/2006" xmlns:a14="http://schemas.microsoft.com/office/drawing/2010/main">
+        <mc:Choice Requires="a14">
           <p:sp>
             <p:nvSpPr>
               <p:cNvPr id="3" name="Segnaposto contenuto 2">
@@ -7676,7 +8434,7 @@
             </p:txBody>
           </p:sp>
         </mc:Choice>
-        <mc:Fallback>
+        <mc:Fallback xmlns="">
           <p:sp>
             <p:nvSpPr>
               <p:cNvPr id="3" name="Segnaposto contenuto 2">
